--- a/demo/HazardHub-CAC-deck.pptx
+++ b/demo/HazardHub-CAC-deck.pptx
@@ -12,6 +12,7 @@
     <p:sldId id="260" r:id="rId11"/>
     <p:sldId id="261" r:id="rId12"/>
     <p:sldId id="262" r:id="rId13"/>
+    <p:sldId id="263" r:id="rId14"/>
   </p:sldIdLst>
   <p:sldSz cx="12191695" cy="6858000" type="screen4x3"/>
   <p:notesSz cx="6858000" cy="9144000"/>
@@ -3806,9 +3807,48 @@
           </a:p>
         </p:txBody>
       </p:sp>
+      <p:sp>
+        <p:nvSpPr>
+          <p:cNvPr id="4" name="TextBox 3"/>
+          <p:cNvSpPr txBox="1"/>
+          <p:nvPr/>
+        </p:nvSpPr>
+        <p:spPr>
+          <a:xfrm>
+            <a:off x="822960" y="1051560"/>
+            <a:ext cx="10515600" cy="457200"/>
+          </a:xfrm>
+          <a:prstGeom prst="rect">
+            <a:avLst/>
+          </a:prstGeom>
+          <a:noFill/>
+        </p:spPr>
+        <p:txBody>
+          <a:bodyPr wrap="square">
+            <a:spAutoFit/>
+          </a:bodyPr>
+          <a:lstStyle/>
+          <a:p>
+            <a:pPr algn="l">
+              <a:lnSpc>
+                <a:spcPct val="100000"/>
+              </a:lnSpc>
+            </a:pPr>
+            <a:r>
+              <a:rPr sz="1600" b="0">
+                <a:solidFill>
+                  <a:srgbClr val="F2A33C"/>
+                </a:solidFill>
+                <a:latin typeface="Arial"/>
+              </a:rPr>
+              <a:t>14 hazard &amp; incident types  ·  one-tap routing  ·  live hazard map</a:t>
+            </a:r>
+          </a:p>
+        </p:txBody>
+      </p:sp>
       <p:pic>
         <p:nvPicPr>
-          <p:cNvPr id="4" name="Picture 3" descr="screen-report.png"/>
+          <p:cNvPr id="5" name="Picture 4" descr="screen-report.png"/>
           <p:cNvPicPr>
             <a:picLocks noChangeAspect="1"/>
           </p:cNvPicPr>
@@ -3822,8 +3862,8 @@
         </p:blipFill>
         <p:spPr>
           <a:xfrm>
-            <a:off x="3003388" y="1554480"/>
-            <a:ext cx="1491303" cy="4206240"/>
+            <a:off x="3019598" y="1645920"/>
+            <a:ext cx="1458883" cy="4114800"/>
           </a:xfrm>
           <a:prstGeom prst="rect">
             <a:avLst/>
@@ -3832,7 +3872,7 @@
       </p:pic>
       <p:sp>
         <p:nvSpPr>
-          <p:cNvPr id="5" name="TextBox 4"/>
+          <p:cNvPr id="6" name="TextBox 5"/>
           <p:cNvSpPr txBox="1"/>
           <p:nvPr/>
         </p:nvSpPr>
@@ -3858,20 +3898,20 @@
               </a:lnSpc>
             </a:pPr>
             <a:r>
-              <a:rPr sz="1600" b="1">
+              <a:rPr sz="1500" b="1">
                 <a:solidFill>
                   <a:srgbClr val="F2A33C"/>
                 </a:solidFill>
                 <a:latin typeface="Arial"/>
               </a:rPr>
-              <a:t>Capture · locate · route</a:t>
+              <a:t>14 types · capture · route</a:t>
             </a:r>
           </a:p>
         </p:txBody>
       </p:sp>
       <p:pic>
         <p:nvPicPr>
-          <p:cNvPr id="6" name="Picture 5" descr="screen-settings.png"/>
+          <p:cNvPr id="7" name="Picture 6" descr="screen-settings.png"/>
           <p:cNvPicPr>
             <a:picLocks noChangeAspect="1"/>
           </p:cNvPicPr>
@@ -3885,8 +3925,8 @@
         </p:blipFill>
         <p:spPr>
           <a:xfrm>
-            <a:off x="6983459" y="1554480"/>
-            <a:ext cx="1943641" cy="4206240"/>
+            <a:off x="7004585" y="1645920"/>
+            <a:ext cx="1901388" cy="4114800"/>
           </a:xfrm>
           <a:prstGeom prst="rect">
             <a:avLst/>
@@ -3895,7 +3935,7 @@
       </p:pic>
       <p:sp>
         <p:nvSpPr>
-          <p:cNvPr id="7" name="TextBox 6"/>
+          <p:cNvPr id="8" name="TextBox 7"/>
           <p:cNvSpPr txBox="1"/>
           <p:nvPr/>
         </p:nvSpPr>
@@ -3921,7 +3961,7 @@
               </a:lnSpc>
             </a:pPr>
             <a:r>
-              <a:rPr sz="1600" b="1">
+              <a:rPr sz="1500" b="1">
                 <a:solidFill>
                   <a:srgbClr val="F2A33C"/>
                 </a:solidFill>
@@ -3941,6 +3981,353 @@
 </file>
 
 <file path=ppt/slides/slide5.xml><?xml version="1.0" encoding="utf-8"?>
+<p:sld xmlns:a="http://schemas.openxmlformats.org/drawingml/2006/main" xmlns:p="http://schemas.openxmlformats.org/presentationml/2006/main" xmlns:r="http://schemas.openxmlformats.org/officeDocument/2006/relationships">
+  <p:cSld>
+    <p:bg>
+      <p:bgPr>
+        <a:solidFill>
+          <a:srgbClr val="15202B"/>
+        </a:solidFill>
+        <a:effectLst/>
+      </p:bgPr>
+    </p:bg>
+    <p:spTree>
+      <p:nvGrpSpPr>
+        <p:cNvPr id="1" name=""/>
+        <p:cNvGrpSpPr/>
+        <p:nvPr/>
+      </p:nvGrpSpPr>
+      <p:grpSpPr/>
+      <p:sp>
+        <p:nvSpPr>
+          <p:cNvPr id="2" name="TextBox 1"/>
+          <p:cNvSpPr txBox="1"/>
+          <p:nvPr/>
+        </p:nvSpPr>
+        <p:spPr>
+          <a:xfrm>
+            <a:off x="822960" y="548640"/>
+            <a:ext cx="10515600" cy="822960"/>
+          </a:xfrm>
+          <a:prstGeom prst="rect">
+            <a:avLst/>
+          </a:prstGeom>
+          <a:noFill/>
+        </p:spPr>
+        <p:txBody>
+          <a:bodyPr wrap="square">
+            <a:spAutoFit/>
+          </a:bodyPr>
+          <a:lstStyle/>
+          <a:p>
+            <a:pPr algn="l">
+              <a:lnSpc>
+                <a:spcPct val="100000"/>
+              </a:lnSpc>
+            </a:pPr>
+            <a:r>
+              <a:rPr sz="4000" b="1">
+                <a:solidFill>
+                  <a:srgbClr val="F1F6FB"/>
+                </a:solidFill>
+                <a:latin typeface="Arial"/>
+              </a:rPr>
+              <a:t>More than potholes</a:t>
+            </a:r>
+          </a:p>
+        </p:txBody>
+      </p:sp>
+      <p:sp>
+        <p:nvSpPr>
+          <p:cNvPr id="3" name="Rectangle 2"/>
+          <p:cNvSpPr/>
+          <p:nvPr/>
+        </p:nvSpPr>
+        <p:spPr>
+          <a:xfrm>
+            <a:off x="822960" y="1371600"/>
+            <a:ext cx="2011680" cy="54864"/>
+          </a:xfrm>
+          <a:prstGeom prst="rect">
+            <a:avLst/>
+          </a:prstGeom>
+          <a:solidFill>
+            <a:srgbClr val="F2A33C"/>
+          </a:solidFill>
+          <a:ln>
+            <a:noFill/>
+          </a:ln>
+        </p:spPr>
+        <p:style>
+          <a:lnRef idx="1">
+            <a:schemeClr val="accent1"/>
+          </a:lnRef>
+          <a:fillRef idx="3">
+            <a:schemeClr val="accent1"/>
+          </a:fillRef>
+          <a:effectRef idx="2">
+            <a:schemeClr val="accent1"/>
+          </a:effectRef>
+          <a:fontRef idx="minor">
+            <a:schemeClr val="lt1"/>
+          </a:fontRef>
+        </p:style>
+        <p:txBody>
+          <a:bodyPr rtlCol="0" anchor="ctr"/>
+          <a:lstStyle/>
+          <a:p>
+            <a:pPr algn="ctr"/>
+          </a:p>
+        </p:txBody>
+      </p:sp>
+      <p:sp>
+        <p:nvSpPr>
+          <p:cNvPr id="4" name="TextBox 3"/>
+          <p:cNvSpPr txBox="1"/>
+          <p:nvPr/>
+        </p:nvSpPr>
+        <p:spPr>
+          <a:xfrm>
+            <a:off x="822960" y="1737360"/>
+            <a:ext cx="5669280" cy="4389120"/>
+          </a:xfrm>
+          <a:prstGeom prst="rect">
+            <a:avLst/>
+          </a:prstGeom>
+          <a:noFill/>
+        </p:spPr>
+        <p:txBody>
+          <a:bodyPr wrap="square">
+            <a:spAutoFit/>
+          </a:bodyPr>
+          <a:lstStyle/>
+          <a:p>
+            <a:pPr algn="l">
+              <a:lnSpc>
+                <a:spcPct val="120000"/>
+              </a:lnSpc>
+            </a:pPr>
+            <a:r>
+              <a:rPr sz="2000" b="0">
+                <a:solidFill>
+                  <a:srgbClr val="9BB0C4"/>
+                </a:solidFill>
+                <a:latin typeface="Arial"/>
+              </a:rPr>
+              <a:t>One capture → locate → route → compose flow,</a:t>
+            </a:r>
+          </a:p>
+          <a:p>
+            <a:pPr algn="l">
+              <a:lnSpc>
+                <a:spcPct val="120000"/>
+              </a:lnSpc>
+            </a:pPr>
+            <a:r>
+              <a:rPr sz="2000" b="0">
+                <a:solidFill>
+                  <a:srgbClr val="9BB0C4"/>
+                </a:solidFill>
+                <a:latin typeface="Arial"/>
+              </a:rPr>
+              <a:t>now across 14 types:</a:t>
+            </a:r>
+          </a:p>
+          <a:p>
+            <a:pPr algn="l">
+              <a:lnSpc>
+                <a:spcPct val="120000"/>
+              </a:lnSpc>
+            </a:pPr>
+            <a:r>
+              <a:rPr sz="2000" b="0">
+                <a:solidFill>
+                  <a:srgbClr val="9BB0C4"/>
+                </a:solidFill>
+                <a:latin typeface="Arial"/>
+              </a:rPr>
+              <a:t/>
+            </a:r>
+          </a:p>
+          <a:p>
+            <a:pPr algn="l">
+              <a:lnSpc>
+                <a:spcPct val="120000"/>
+              </a:lnSpc>
+            </a:pPr>
+            <a:r>
+              <a:rPr sz="2000" b="0">
+                <a:solidFill>
+                  <a:srgbClr val="9BB0C4"/>
+                </a:solidFill>
+                <a:latin typeface="Arial"/>
+              </a:rPr>
+              <a:t>• Maintenance hazards: potholes, trees,</a:t>
+            </a:r>
+          </a:p>
+          <a:p>
+            <a:pPr algn="l">
+              <a:lnSpc>
+                <a:spcPct val="120000"/>
+              </a:lnSpc>
+            </a:pPr>
+            <a:r>
+              <a:rPr sz="2000" b="0">
+                <a:solidFill>
+                  <a:srgbClr val="9BB0C4"/>
+                </a:solidFill>
+                <a:latin typeface="Arial"/>
+              </a:rPr>
+              <a:t>   flooding, dead animals, signal/light,</a:t>
+            </a:r>
+          </a:p>
+          <a:p>
+            <a:pPr algn="l">
+              <a:lnSpc>
+                <a:spcPct val="120000"/>
+              </a:lnSpc>
+            </a:pPr>
+            <a:r>
+              <a:rPr sz="2000" b="0">
+                <a:solidFill>
+                  <a:srgbClr val="9BB0C4"/>
+                </a:solidFill>
+                <a:latin typeface="Arial"/>
+              </a:rPr>
+              <a:t>   signs, debris, sidewalk, storm/ice</a:t>
+            </a:r>
+          </a:p>
+          <a:p>
+            <a:pPr algn="l">
+              <a:lnSpc>
+                <a:spcPct val="120000"/>
+              </a:lnSpc>
+            </a:pPr>
+            <a:r>
+              <a:rPr sz="2000" b="0">
+                <a:solidFill>
+                  <a:srgbClr val="9BB0C4"/>
+                </a:solidFill>
+                <a:latin typeface="Arial"/>
+              </a:rPr>
+              <a:t>• Incidents: accidents, disabled vehicles,</a:t>
+            </a:r>
+          </a:p>
+          <a:p>
+            <a:pPr algn="l">
+              <a:lnSpc>
+                <a:spcPct val="120000"/>
+              </a:lnSpc>
+            </a:pPr>
+            <a:r>
+              <a:rPr sz="2000" b="0">
+                <a:solidFill>
+                  <a:srgbClr val="9BB0C4"/>
+                </a:solidFill>
+                <a:latin typeface="Arial"/>
+              </a:rPr>
+              <a:t>   road closures, downed power lines</a:t>
+            </a:r>
+          </a:p>
+          <a:p>
+            <a:pPr algn="l">
+              <a:lnSpc>
+                <a:spcPct val="120000"/>
+              </a:lnSpc>
+            </a:pPr>
+            <a:r>
+              <a:rPr sz="2000" b="0">
+                <a:solidFill>
+                  <a:srgbClr val="9BB0C4"/>
+                </a:solidFill>
+                <a:latin typeface="Arial"/>
+              </a:rPr>
+              <a:t/>
+            </a:r>
+          </a:p>
+          <a:p>
+            <a:pPr algn="l">
+              <a:lnSpc>
+                <a:spcPct val="120000"/>
+              </a:lnSpc>
+            </a:pPr>
+            <a:r>
+              <a:rPr sz="2000" b="0">
+                <a:solidFill>
+                  <a:srgbClr val="9BB0C4"/>
+                </a:solidFill>
+                <a:latin typeface="Arial"/>
+              </a:rPr>
+              <a:t>Life-safety cases show a warning + one-tap</a:t>
+            </a:r>
+          </a:p>
+          <a:p>
+            <a:pPr algn="l">
+              <a:lnSpc>
+                <a:spcPct val="120000"/>
+              </a:lnSpc>
+            </a:pPr>
+            <a:r>
+              <a:rPr sz="2000" b="0">
+                <a:solidFill>
+                  <a:srgbClr val="9BB0C4"/>
+                </a:solidFill>
+                <a:latin typeface="Arial"/>
+              </a:rPr>
+              <a:t>Call 911 — the app says plainly it does</a:t>
+            </a:r>
+          </a:p>
+          <a:p>
+            <a:pPr algn="l">
+              <a:lnSpc>
+                <a:spcPct val="120000"/>
+              </a:lnSpc>
+            </a:pPr>
+            <a:r>
+              <a:rPr sz="2000" b="0">
+                <a:solidFill>
+                  <a:srgbClr val="9BB0C4"/>
+                </a:solidFill>
+                <a:latin typeface="Arial"/>
+              </a:rPr>
+              <a:t>NOT dispatch help itself.</a:t>
+            </a:r>
+          </a:p>
+        </p:txBody>
+      </p:sp>
+      <p:pic>
+        <p:nvPicPr>
+          <p:cNvPr id="5" name="Picture 4" descr="04-map.png"/>
+          <p:cNvPicPr>
+            <a:picLocks noChangeAspect="1"/>
+          </p:cNvPicPr>
+          <p:nvPr/>
+        </p:nvPicPr>
+        <p:blipFill>
+          <a:blip r:embed="rId2"/>
+          <a:stretch>
+            <a:fillRect/>
+          </a:stretch>
+        </p:blipFill>
+        <p:spPr>
+          <a:xfrm>
+            <a:off x="6492240" y="2414587"/>
+            <a:ext cx="5394960" cy="3034665"/>
+          </a:xfrm>
+          <a:prstGeom prst="rect">
+            <a:avLst/>
+          </a:prstGeom>
+        </p:spPr>
+      </p:pic>
+    </p:spTree>
+  </p:cSld>
+  <p:clrMapOvr>
+    <a:masterClrMapping/>
+  </p:clrMapOvr>
+</p:sld>
+</file>
+
+<file path=ppt/slides/slide6.xml><?xml version="1.0" encoding="utf-8"?>
 <p:sld xmlns:a="http://schemas.openxmlformats.org/drawingml/2006/main" xmlns:p="http://schemas.openxmlformats.org/presentationml/2006/main" xmlns:r="http://schemas.openxmlformats.org/officeDocument/2006/relationships">
   <p:cSld>
     <p:bg>
@@ -3990,7 +4377,7 @@
 </p:sld>
 </file>
 
-<file path=ppt/slides/slide6.xml><?xml version="1.0" encoding="utf-8"?>
+<file path=ppt/slides/slide7.xml><?xml version="1.0" encoding="utf-8"?>
 <p:sld xmlns:a="http://schemas.openxmlformats.org/drawingml/2006/main" xmlns:p="http://schemas.openxmlformats.org/presentationml/2006/main" xmlns:r="http://schemas.openxmlformats.org/officeDocument/2006/relationships">
   <p:cSld>
     <p:bg>
@@ -4040,7 +4427,7 @@
 </p:sld>
 </file>
 
-<file path=ppt/slides/slide7.xml><?xml version="1.0" encoding="utf-8"?>
+<file path=ppt/slides/slide8.xml><?xml version="1.0" encoding="utf-8"?>
 <p:sld xmlns:a="http://schemas.openxmlformats.org/drawingml/2006/main" xmlns:p="http://schemas.openxmlformats.org/presentationml/2006/main" xmlns:r="http://schemas.openxmlformats.org/officeDocument/2006/relationships">
   <p:cSld>
     <p:bg>
@@ -4149,7 +4536,7 @@
         <p:spPr>
           <a:xfrm>
             <a:off x="822960" y="2651760"/>
-            <a:ext cx="10515600" cy="2377440"/>
+            <a:ext cx="10515600" cy="2560320"/>
           </a:xfrm>
           <a:prstGeom prst="rect">
             <a:avLst/>
@@ -4164,27 +4551,43 @@
           <a:p>
             <a:pPr algn="l">
               <a:lnSpc>
-                <a:spcPct val="130000"/>
+                <a:spcPct val="125000"/>
               </a:lnSpc>
             </a:pPr>
             <a:r>
-              <a:rPr sz="2200" b="0">
+              <a:rPr sz="2100" b="0">
                 <a:solidFill>
                   <a:srgbClr val="9BB0C4"/>
                 </a:solidFill>
                 <a:latin typeface="Arial"/>
               </a:rPr>
-              <a:t>A real, installable app that turns a multi-step scavenger hunt into four taps.</a:t>
+              <a:t>A real, installable app that turns a multi-step scavenger hunt into a few taps —</a:t>
             </a:r>
           </a:p>
           <a:p>
             <a:pPr algn="l">
               <a:lnSpc>
-                <a:spcPct val="130000"/>
+                <a:spcPct val="125000"/>
               </a:lnSpc>
             </a:pPr>
             <a:r>
-              <a:rPr sz="2200" b="0">
+              <a:rPr sz="2100" b="0">
+                <a:solidFill>
+                  <a:srgbClr val="9BB0C4"/>
+                </a:solidFill>
+                <a:latin typeface="Arial"/>
+              </a:rPr>
+              <a:t>across 14 hazard and incident types, with a map of what’s been reported.</a:t>
+            </a:r>
+          </a:p>
+          <a:p>
+            <a:pPr algn="l">
+              <a:lnSpc>
+                <a:spcPct val="125000"/>
+              </a:lnSpc>
+            </a:pPr>
+            <a:r>
+              <a:rPr sz="2100" b="0">
                 <a:solidFill>
                   <a:srgbClr val="9BB0C4"/>
                 </a:solidFill>
@@ -4196,33 +4599,49 @@
           <a:p>
             <a:pPr algn="l">
               <a:lnSpc>
-                <a:spcPct val="130000"/>
+                <a:spcPct val="125000"/>
               </a:lnSpc>
             </a:pPr>
             <a:r>
-              <a:rPr sz="2200" b="0">
+              <a:rPr sz="2100" b="0">
                 <a:solidFill>
                   <a:srgbClr val="9BB0C4"/>
                 </a:solidFill>
                 <a:latin typeface="Arial"/>
               </a:rPr>
-              <a:t>Next: a roads dataset for exact per-street routing, status follow-up, and other</a:t>
+              <a:t>Next: on-device AI to suggest the hazard type from the photo, a roads dataset for</a:t>
             </a:r>
           </a:p>
           <a:p>
             <a:pPr algn="l">
               <a:lnSpc>
-                <a:spcPct val="130000"/>
+                <a:spcPct val="125000"/>
               </a:lnSpc>
             </a:pPr>
             <a:r>
-              <a:rPr sz="2200" b="0">
+              <a:rPr sz="2100" b="0">
                 <a:solidFill>
                   <a:srgbClr val="9BB0C4"/>
                 </a:solidFill>
                 <a:latin typeface="Arial"/>
               </a:rPr>
-              <a:t>hazards — downed signs, broken lights, missing curb cuts.</a:t>
+              <a:t>exact per-street routing, and a shared backend so the map goes community-wide</a:t>
+            </a:r>
+          </a:p>
+          <a:p>
+            <a:pPr algn="l">
+              <a:lnSpc>
+                <a:spcPct val="125000"/>
+              </a:lnSpc>
+            </a:pPr>
+            <a:r>
+              <a:rPr sz="2100" b="0">
+                <a:solidFill>
+                  <a:srgbClr val="9BB0C4"/>
+                </a:solidFill>
+                <a:latin typeface="Arial"/>
+              </a:rPr>
+              <a:t>with a municipal dashboard for faster agency response.</a:t>
             </a:r>
           </a:p>
         </p:txBody>

--- a/demo/HazardHub-CAC-deck.pptx
+++ b/demo/HazardHub-CAC-deck.pptx
@@ -13,6 +13,7 @@
     <p:sldId id="261" r:id="rId12"/>
     <p:sldId id="262" r:id="rId13"/>
     <p:sldId id="263" r:id="rId14"/>
+    <p:sldId id="264" r:id="rId15"/>
   </p:sldIdLst>
   <p:sldSz cx="12191695" cy="6858000" type="screen4x3"/>
   <p:notesSz cx="6858000" cy="9144000"/>
@@ -3841,7 +3842,7 @@
                 </a:solidFill>
                 <a:latin typeface="Arial"/>
               </a:rPr>
-              <a:t>14 hazard &amp; incident types  ·  one-tap routing  ·  live hazard map</a:t>
+              <a:t>14 types  ·  on-device AI suggestion  ·  one-tap routing  ·  hazard map</a:t>
             </a:r>
           </a:p>
         </p:txBody>
@@ -4345,6 +4346,313 @@
         <p:nvPr/>
       </p:nvGrpSpPr>
       <p:grpSpPr/>
+      <p:sp>
+        <p:nvSpPr>
+          <p:cNvPr id="2" name="TextBox 1"/>
+          <p:cNvSpPr txBox="1"/>
+          <p:nvPr/>
+        </p:nvSpPr>
+        <p:spPr>
+          <a:xfrm>
+            <a:off x="822960" y="548640"/>
+            <a:ext cx="10515600" cy="822960"/>
+          </a:xfrm>
+          <a:prstGeom prst="rect">
+            <a:avLst/>
+          </a:prstGeom>
+          <a:noFill/>
+        </p:spPr>
+        <p:txBody>
+          <a:bodyPr wrap="square">
+            <a:spAutoFit/>
+          </a:bodyPr>
+          <a:lstStyle/>
+          <a:p>
+            <a:pPr algn="l">
+              <a:lnSpc>
+                <a:spcPct val="100000"/>
+              </a:lnSpc>
+            </a:pPr>
+            <a:r>
+              <a:rPr sz="4000" b="1">
+                <a:solidFill>
+                  <a:srgbClr val="F1F6FB"/>
+                </a:solidFill>
+                <a:latin typeface="Arial"/>
+              </a:rPr>
+              <a:t>AI that suggests — honestly</a:t>
+            </a:r>
+          </a:p>
+        </p:txBody>
+      </p:sp>
+      <p:sp>
+        <p:nvSpPr>
+          <p:cNvPr id="3" name="Rectangle 2"/>
+          <p:cNvSpPr/>
+          <p:nvPr/>
+        </p:nvSpPr>
+        <p:spPr>
+          <a:xfrm>
+            <a:off x="822960" y="1371600"/>
+            <a:ext cx="2011680" cy="54864"/>
+          </a:xfrm>
+          <a:prstGeom prst="rect">
+            <a:avLst/>
+          </a:prstGeom>
+          <a:solidFill>
+            <a:srgbClr val="F2A33C"/>
+          </a:solidFill>
+          <a:ln>
+            <a:noFill/>
+          </a:ln>
+        </p:spPr>
+        <p:style>
+          <a:lnRef idx="1">
+            <a:schemeClr val="accent1"/>
+          </a:lnRef>
+          <a:fillRef idx="3">
+            <a:schemeClr val="accent1"/>
+          </a:fillRef>
+          <a:effectRef idx="2">
+            <a:schemeClr val="accent1"/>
+          </a:effectRef>
+          <a:fontRef idx="minor">
+            <a:schemeClr val="lt1"/>
+          </a:fontRef>
+        </p:style>
+        <p:txBody>
+          <a:bodyPr rtlCol="0" anchor="ctr"/>
+          <a:lstStyle/>
+          <a:p>
+            <a:pPr algn="ctr"/>
+          </a:p>
+        </p:txBody>
+      </p:sp>
+      <p:sp>
+        <p:nvSpPr>
+          <p:cNvPr id="4" name="TextBox 3"/>
+          <p:cNvSpPr txBox="1"/>
+          <p:nvPr/>
+        </p:nvSpPr>
+        <p:spPr>
+          <a:xfrm>
+            <a:off x="822960" y="1737360"/>
+            <a:ext cx="10515600" cy="4389120"/>
+          </a:xfrm>
+          <a:prstGeom prst="rect">
+            <a:avLst/>
+          </a:prstGeom>
+          <a:noFill/>
+        </p:spPr>
+        <p:txBody>
+          <a:bodyPr wrap="square">
+            <a:spAutoFit/>
+          </a:bodyPr>
+          <a:lstStyle/>
+          <a:p>
+            <a:pPr algn="l">
+              <a:lnSpc>
+                <a:spcPct val="120000"/>
+              </a:lnSpc>
+            </a:pPr>
+            <a:r>
+              <a:rPr sz="2100" b="0">
+                <a:solidFill>
+                  <a:srgbClr val="9BB0C4"/>
+                </a:solidFill>
+                <a:latin typeface="Arial"/>
+              </a:rPr>
+              <a:t>Take a photo → an on-device model suggests the hazard type with a confidence %.</a:t>
+            </a:r>
+          </a:p>
+          <a:p>
+            <a:pPr algn="l">
+              <a:lnSpc>
+                <a:spcPct val="120000"/>
+              </a:lnSpc>
+            </a:pPr>
+            <a:r>
+              <a:rPr sz="2100" b="0">
+                <a:solidFill>
+                  <a:srgbClr val="9BB0C4"/>
+                </a:solidFill>
+                <a:latin typeface="Arial"/>
+              </a:rPr>
+              <a:t/>
+            </a:r>
+          </a:p>
+          <a:p>
+            <a:pPr algn="l">
+              <a:lnSpc>
+                <a:spcPct val="120000"/>
+              </a:lnSpc>
+            </a:pPr>
+            <a:r>
+              <a:rPr sz="2100" b="0">
+                <a:solidFill>
+                  <a:srgbClr val="9BB0C4"/>
+                </a:solidFill>
+                <a:latin typeface="Arial"/>
+              </a:rPr>
+              <a:t>• A model I trained on Google’s Teachable Machine — so it learns the actual</a:t>
+            </a:r>
+          </a:p>
+          <a:p>
+            <a:pPr algn="l">
+              <a:lnSpc>
+                <a:spcPct val="120000"/>
+              </a:lnSpc>
+            </a:pPr>
+            <a:r>
+              <a:rPr sz="2100" b="0">
+                <a:solidFill>
+                  <a:srgbClr val="9BB0C4"/>
+                </a:solidFill>
+                <a:latin typeface="Arial"/>
+              </a:rPr>
+              <a:t>   classes (pothole, flooding, tree…), which a generic model can’t recognize.</a:t>
+            </a:r>
+          </a:p>
+          <a:p>
+            <a:pPr algn="l">
+              <a:lnSpc>
+                <a:spcPct val="120000"/>
+              </a:lnSpc>
+            </a:pPr>
+            <a:r>
+              <a:rPr sz="2100" b="0">
+                <a:solidFill>
+                  <a:srgbClr val="9BB0C4"/>
+                </a:solidFill>
+                <a:latin typeface="Arial"/>
+              </a:rPr>
+              <a:t>• Runs on-device with TensorFlow.js (pure-JS backend). I switched to it after the</a:t>
+            </a:r>
+          </a:p>
+          <a:p>
+            <a:pPr algn="l">
+              <a:lnSpc>
+                <a:spcPct val="120000"/>
+              </a:lnSpc>
+            </a:pPr>
+            <a:r>
+              <a:rPr sz="2100" b="0">
+                <a:solidFill>
+                  <a:srgbClr val="9BB0C4"/>
+                </a:solidFill>
+                <a:latin typeface="Arial"/>
+              </a:rPr>
+              <a:t>   usual RN ML library turned out incompatible with Expo’s New Architecture.</a:t>
+            </a:r>
+          </a:p>
+          <a:p>
+            <a:pPr algn="l">
+              <a:lnSpc>
+                <a:spcPct val="120000"/>
+              </a:lnSpc>
+            </a:pPr>
+            <a:r>
+              <a:rPr sz="2100" b="0">
+                <a:solidFill>
+                  <a:srgbClr val="9BB0C4"/>
+                </a:solidFill>
+                <a:latin typeface="Arial"/>
+              </a:rPr>
+              <a:t>• It’s a SUGGESTION with a visible confidence score that the user confirms or</a:t>
+            </a:r>
+          </a:p>
+          <a:p>
+            <a:pPr algn="l">
+              <a:lnSpc>
+                <a:spcPct val="120000"/>
+              </a:lnSpc>
+            </a:pPr>
+            <a:r>
+              <a:rPr sz="2100" b="0">
+                <a:solidFill>
+                  <a:srgbClr val="9BB0C4"/>
+                </a:solidFill>
+                <a:latin typeface="Arial"/>
+              </a:rPr>
+              <a:t>   overrides — and it says so. An AI that silently mislabels a downed power line</a:t>
+            </a:r>
+          </a:p>
+          <a:p>
+            <a:pPr algn="l">
+              <a:lnSpc>
+                <a:spcPct val="120000"/>
+              </a:lnSpc>
+            </a:pPr>
+            <a:r>
+              <a:rPr sz="2100" b="0">
+                <a:solidFill>
+                  <a:srgbClr val="9BB0C4"/>
+                </a:solidFill>
+                <a:latin typeface="Arial"/>
+              </a:rPr>
+              <a:t>   as a pothole would be worse than no AI.</a:t>
+            </a:r>
+          </a:p>
+          <a:p>
+            <a:pPr algn="l">
+              <a:lnSpc>
+                <a:spcPct val="120000"/>
+              </a:lnSpc>
+            </a:pPr>
+            <a:r>
+              <a:rPr sz="2100" b="0">
+                <a:solidFill>
+                  <a:srgbClr val="9BB0C4"/>
+                </a:solidFill>
+                <a:latin typeface="Arial"/>
+              </a:rPr>
+              <a:t/>
+            </a:r>
+          </a:p>
+          <a:p>
+            <a:pPr algn="l">
+              <a:lnSpc>
+                <a:spcPct val="120000"/>
+              </a:lnSpc>
+            </a:pPr>
+            <a:r>
+              <a:rPr sz="2100" b="0">
+                <a:solidFill>
+                  <a:srgbClr val="9BB0C4"/>
+                </a:solidFill>
+                <a:latin typeface="Arial"/>
+              </a:rPr>
+              <a:t>The honest, debuggable version of the feature — not a magic “detect anything” badge.</a:t>
+            </a:r>
+          </a:p>
+        </p:txBody>
+      </p:sp>
+    </p:spTree>
+  </p:cSld>
+  <p:clrMapOvr>
+    <a:masterClrMapping/>
+  </p:clrMapOvr>
+</p:sld>
+</file>
+
+<file path=ppt/slides/slide7.xml><?xml version="1.0" encoding="utf-8"?>
+<p:sld xmlns:a="http://schemas.openxmlformats.org/drawingml/2006/main" xmlns:p="http://schemas.openxmlformats.org/presentationml/2006/main" xmlns:r="http://schemas.openxmlformats.org/officeDocument/2006/relationships">
+  <p:cSld>
+    <p:bg>
+      <p:bgPr>
+        <a:solidFill>
+          <a:srgbClr val="15202B"/>
+        </a:solidFill>
+        <a:effectLst/>
+      </p:bgPr>
+    </p:bg>
+    <p:spTree>
+      <p:nvGrpSpPr>
+        <p:cNvPr id="1" name=""/>
+        <p:cNvGrpSpPr/>
+        <p:nvPr/>
+      </p:nvGrpSpPr>
+      <p:grpSpPr/>
       <p:pic>
         <p:nvPicPr>
           <p:cNvPr id="2" name="Picture 1" descr="02-honest.png"/>
@@ -4377,7 +4685,7 @@
 </p:sld>
 </file>
 
-<file path=ppt/slides/slide7.xml><?xml version="1.0" encoding="utf-8"?>
+<file path=ppt/slides/slide8.xml><?xml version="1.0" encoding="utf-8"?>
 <p:sld xmlns:a="http://schemas.openxmlformats.org/drawingml/2006/main" xmlns:p="http://schemas.openxmlformats.org/presentationml/2006/main" xmlns:r="http://schemas.openxmlformats.org/officeDocument/2006/relationships">
   <p:cSld>
     <p:bg>
@@ -4427,7 +4735,7 @@
 </p:sld>
 </file>
 
-<file path=ppt/slides/slide8.xml><?xml version="1.0" encoding="utf-8"?>
+<file path=ppt/slides/slide9.xml><?xml version="1.0" encoding="utf-8"?>
 <p:sld xmlns:a="http://schemas.openxmlformats.org/drawingml/2006/main" xmlns:p="http://schemas.openxmlformats.org/presentationml/2006/main" xmlns:r="http://schemas.openxmlformats.org/officeDocument/2006/relationships">
   <p:cSld>
     <p:bg>
@@ -4551,7 +4859,7 @@
           <a:p>
             <a:pPr algn="l">
               <a:lnSpc>
-                <a:spcPct val="125000"/>
+                <a:spcPct val="120000"/>
               </a:lnSpc>
             </a:pPr>
             <a:r>
@@ -4567,7 +4875,7 @@
           <a:p>
             <a:pPr algn="l">
               <a:lnSpc>
-                <a:spcPct val="125000"/>
+                <a:spcPct val="120000"/>
               </a:lnSpc>
             </a:pPr>
             <a:r>
@@ -4577,13 +4885,13 @@
                 </a:solidFill>
                 <a:latin typeface="Arial"/>
               </a:rPr>
-              <a:t>across 14 hazard and incident types, with a map of what’s been reported.</a:t>
+              <a:t>across 14 hazard and incident types, with an on-device AI suggestion and a map</a:t>
             </a:r>
           </a:p>
           <a:p>
             <a:pPr algn="l">
               <a:lnSpc>
-                <a:spcPct val="125000"/>
+                <a:spcPct val="120000"/>
               </a:lnSpc>
             </a:pPr>
             <a:r>
@@ -4593,13 +4901,29 @@
                 </a:solidFill>
                 <a:latin typeface="Arial"/>
               </a:rPr>
+              <a:t>of what’s been reported.</a:t>
+            </a:r>
+          </a:p>
+          <a:p>
+            <a:pPr algn="l">
+              <a:lnSpc>
+                <a:spcPct val="120000"/>
+              </a:lnSpc>
+            </a:pPr>
+            <a:r>
+              <a:rPr sz="2100" b="0">
+                <a:solidFill>
+                  <a:srgbClr val="9BB0C4"/>
+                </a:solidFill>
+                <a:latin typeface="Arial"/>
+              </a:rPr>
               <a:t/>
             </a:r>
           </a:p>
           <a:p>
             <a:pPr algn="l">
               <a:lnSpc>
-                <a:spcPct val="125000"/>
+                <a:spcPct val="120000"/>
               </a:lnSpc>
             </a:pPr>
             <a:r>
@@ -4609,13 +4933,13 @@
                 </a:solidFill>
                 <a:latin typeface="Arial"/>
               </a:rPr>
-              <a:t>Next: on-device AI to suggest the hazard type from the photo, a roads dataset for</a:t>
+              <a:t>Next: train the model on more photos for sharper suggestions, a roads dataset for</a:t>
             </a:r>
           </a:p>
           <a:p>
             <a:pPr algn="l">
               <a:lnSpc>
-                <a:spcPct val="125000"/>
+                <a:spcPct val="120000"/>
               </a:lnSpc>
             </a:pPr>
             <a:r>
@@ -4631,7 +4955,7 @@
           <a:p>
             <a:pPr algn="l">
               <a:lnSpc>
-                <a:spcPct val="125000"/>
+                <a:spcPct val="120000"/>
               </a:lnSpc>
             </a:pPr>
             <a:r>
